--- a/classes/parte-3-estadistica-inferencial/191-synthetic-control-method-pysyncon/clase-191-synthetic-control-method-pysyncon-presentacion.pptx
+++ b/classes/parte-3-estadistica-inferencial/191-synthetic-control-method-pysyncon/clase-191-synthetic-control-method-pysyncon-presentacion.pptx
@@ -3272,7 +3272,7 @@
                 </a:solidFill>
                 <a:latin typeface="Segoe UI"/>
               </a:rPr>
-              <a:t>Parte: 3 — Estadística Inferencial y Causal · Fuente: Abadie, Diamond &amp; Hainmueller (2010) + Doudchenko &amp; Imbens (2016) + Arkhangelsky et al. (2021) Synthetic DiD.  Duración estimada: 80 min.</a:t>
+              <a:t>Parte: 3 — Estadística Inferencial y Causal · Fuente: Abadie, Diamond &amp; Hainmueller (2010) + Doudchenko &amp; Imbens (2016) + Arkhangelsky et al. (2021) Synthetic DiD.  Duración estimada: 80 min. · Nivel: Avanzado</a:t>
             </a:r>
           </a:p>
         </p:txBody>
@@ -3581,7 +3581,7 @@
                 </a:solidFill>
                 <a:latin typeface="Segoe UI"/>
               </a:rPr>
-              <a:t>Parte: 3 — Estadística Inferencial y Causal · Fuente: Abadie, Diamond &amp; Hainmueller (2010) + Doudchenko &amp; Imbens (2016) + Arkhangelsky et al. (2021) Synthetic DiD.  Duración estimada: 80 min.</a:t>
+              <a:t>Parte: 3 — Estadística Inferencial y Causal · Fuente: Abadie, Diamond &amp; Hainmueller (2010) + Doudchenko &amp; Imbens (2016) + Arkhangelsky et al. (2021) Synthetic DiD.  Duración estimada: 80 min. · Nivel: Avanzado</a:t>
             </a:r>
           </a:p>
         </p:txBody>
